--- a/GBFC/Fase 2/Evidencial Proyecto/Presentacion Proyecto.pptx
+++ b/GBFC/Fase 2/Evidencial Proyecto/Presentacion Proyecto.pptx
@@ -352,7 +352,7 @@
           <a:p>
             <a:fld id="{6E1704C8-43E3-4F4F-BE90-356A640D5754}" type="datetimeFigureOut">
               <a:rPr lang="es-CL" smtClean="0"/>
-              <a:t>06-07-2025</a:t>
+              <a:t>08-07-2025</a:t>
             </a:fld>
             <a:endParaRPr lang="es-CL"/>
           </a:p>
@@ -563,7 +563,7 @@
           <a:p>
             <a:fld id="{6E1704C8-43E3-4F4F-BE90-356A640D5754}" type="datetimeFigureOut">
               <a:rPr lang="es-CL" smtClean="0"/>
-              <a:t>06-07-2025</a:t>
+              <a:t>08-07-2025</a:t>
             </a:fld>
             <a:endParaRPr lang="es-CL"/>
           </a:p>
@@ -822,7 +822,7 @@
           <a:p>
             <a:fld id="{6E1704C8-43E3-4F4F-BE90-356A640D5754}" type="datetimeFigureOut">
               <a:rPr lang="es-CL" smtClean="0"/>
-              <a:t>06-07-2025</a:t>
+              <a:t>08-07-2025</a:t>
             </a:fld>
             <a:endParaRPr lang="es-CL"/>
           </a:p>
@@ -999,7 +999,7 @@
           <a:p>
             <a:fld id="{6E1704C8-43E3-4F4F-BE90-356A640D5754}" type="datetimeFigureOut">
               <a:rPr lang="es-CL" smtClean="0"/>
-              <a:t>06-07-2025</a:t>
+              <a:t>08-07-2025</a:t>
             </a:fld>
             <a:endParaRPr lang="es-CL"/>
           </a:p>
@@ -1345,7 +1345,7 @@
           <a:p>
             <a:fld id="{6E1704C8-43E3-4F4F-BE90-356A640D5754}" type="datetimeFigureOut">
               <a:rPr lang="es-CL" smtClean="0"/>
-              <a:t>06-07-2025</a:t>
+              <a:t>08-07-2025</a:t>
             </a:fld>
             <a:endParaRPr lang="es-CL"/>
           </a:p>
@@ -1623,7 +1623,7 @@
           <a:p>
             <a:fld id="{6E1704C8-43E3-4F4F-BE90-356A640D5754}" type="datetimeFigureOut">
               <a:rPr lang="es-CL" smtClean="0"/>
-              <a:t>06-07-2025</a:t>
+              <a:t>08-07-2025</a:t>
             </a:fld>
             <a:endParaRPr lang="es-CL"/>
           </a:p>
@@ -2005,7 +2005,7 @@
           <a:p>
             <a:fld id="{6E1704C8-43E3-4F4F-BE90-356A640D5754}" type="datetimeFigureOut">
               <a:rPr lang="es-CL" smtClean="0"/>
-              <a:t>06-07-2025</a:t>
+              <a:t>08-07-2025</a:t>
             </a:fld>
             <a:endParaRPr lang="es-CL"/>
           </a:p>
@@ -2126,7 +2126,7 @@
           <a:p>
             <a:fld id="{6E1704C8-43E3-4F4F-BE90-356A640D5754}" type="datetimeFigureOut">
               <a:rPr lang="es-CL" smtClean="0"/>
-              <a:t>06-07-2025</a:t>
+              <a:t>08-07-2025</a:t>
             </a:fld>
             <a:endParaRPr lang="es-CL"/>
           </a:p>
@@ -2300,7 +2300,7 @@
           <a:p>
             <a:fld id="{6E1704C8-43E3-4F4F-BE90-356A640D5754}" type="datetimeFigureOut">
               <a:rPr lang="es-CL" smtClean="0"/>
-              <a:t>06-07-2025</a:t>
+              <a:t>08-07-2025</a:t>
             </a:fld>
             <a:endParaRPr lang="es-CL"/>
           </a:p>
@@ -2657,7 +2657,7 @@
           <a:p>
             <a:fld id="{6E1704C8-43E3-4F4F-BE90-356A640D5754}" type="datetimeFigureOut">
               <a:rPr lang="es-CL" smtClean="0"/>
-              <a:t>06-07-2025</a:t>
+              <a:t>08-07-2025</a:t>
             </a:fld>
             <a:endParaRPr lang="es-CL"/>
           </a:p>
@@ -3042,7 +3042,7 @@
           <a:p>
             <a:fld id="{6E1704C8-43E3-4F4F-BE90-356A640D5754}" type="datetimeFigureOut">
               <a:rPr lang="es-CL" smtClean="0"/>
-              <a:t>06-07-2025</a:t>
+              <a:t>08-07-2025</a:t>
             </a:fld>
             <a:endParaRPr lang="es-CL"/>
           </a:p>
@@ -3329,7 +3329,7 @@
           <a:p>
             <a:fld id="{6E1704C8-43E3-4F4F-BE90-356A640D5754}" type="datetimeFigureOut">
               <a:rPr lang="es-CL" smtClean="0"/>
-              <a:t>06-07-2025</a:t>
+              <a:t>08-07-2025</a:t>
             </a:fld>
             <a:endParaRPr lang="es-CL"/>
           </a:p>
@@ -4159,7 +4159,7 @@
         </p:blipFill>
         <p:spPr>
           <a:xfrm>
-            <a:off x="3036262" y="1392781"/>
+            <a:off x="3036262" y="1402112"/>
             <a:ext cx="6119476" cy="4695615"/>
           </a:xfrm>
           <a:prstGeom prst="rect">
@@ -4353,10 +4353,10 @@
       </p:pic>
       <p:pic>
         <p:nvPicPr>
-          <p:cNvPr id="4" name="Imagen 3">
+          <p:cNvPr id="5" name="Imagen 4">
             <a:extLst>
               <a:ext uri="{FF2B5EF4-FFF2-40B4-BE49-F238E27FC236}">
-                <a16:creationId xmlns:a16="http://schemas.microsoft.com/office/drawing/2014/main" id="{49E18669-C013-DA3E-845B-62FB5384FD7A}"/>
+                <a16:creationId xmlns:a16="http://schemas.microsoft.com/office/drawing/2014/main" id="{EF455D27-3075-3213-D546-B8D9C072434E}"/>
               </a:ext>
             </a:extLst>
           </p:cNvPr>
@@ -4379,8 +4379,8 @@
         </p:blipFill>
         <p:spPr>
           <a:xfrm>
-            <a:off x="457919" y="1404358"/>
-            <a:ext cx="11457992" cy="4512494"/>
+            <a:off x="219268" y="1343608"/>
+            <a:ext cx="11753461" cy="4989099"/>
           </a:xfrm>
           <a:prstGeom prst="rect">
             <a:avLst/>
@@ -7102,7 +7102,7 @@
             </a:pPr>
             <a:r>
               <a:rPr lang="es-CL" sz="2400" dirty="0"/>
-              <a:t>El proyecto se desarrollo con la metodología cascada, la cual se dividió en 5 fases secuenciales.</a:t>
+              <a:t>El proyecto se desarrolló con la metodología cascada, la cual se dividió en 5 fases secuenciales.</a:t>
             </a:r>
           </a:p>
           <a:p>
@@ -7112,7 +7112,7 @@
             </a:pPr>
             <a:r>
               <a:rPr lang="es-CL" sz="2400" dirty="0"/>
-              <a:t>Las fases del proyecto son: Análisis de requerimientos, diseño del sistema, desarrollo, pruebas y despliegue.</a:t>
+              <a:t>Las fases del proyecto fueron: Análisis de requerimientos, diseño del sistema, desarrollo, pruebas y despliegue.</a:t>
             </a:r>
           </a:p>
           <a:p>
@@ -7122,7 +7122,7 @@
             </a:pPr>
             <a:r>
               <a:rPr lang="es-CL" sz="2400" dirty="0"/>
-              <a:t>La metodología permitió avanzar de forma estructurada y garantizara que cada fase se valide antes de pasar a la siguiente.</a:t>
+              <a:t>La metodología permitió avanzar de forma estructurada y garantizo que cada fase se validara antes de pasar a la siguiente.</a:t>
             </a:r>
           </a:p>
         </p:txBody>
